--- a/Main/Study/First Sem/All Notes and Resources Combined/NN Notes/Unit -6 Self Organizing Maps.pptx
+++ b/Main/Study/First Sem/All Notes and Resources Combined/NN Notes/Unit -6 Self Organizing Maps.pptx
@@ -169,6 +169,45 @@
 
 <file path=ppt/changesInfos/changesInfo1.xml><?xml version="1.0" encoding="utf-8"?>
 <pc:chgInfo xmlns:a="http://schemas.openxmlformats.org/drawingml/2006/main" xmlns:r="http://schemas.openxmlformats.org/officeDocument/2006/relationships" xmlns:ac="http://schemas.microsoft.com/office/drawing/2013/main/command" xmlns:pc="http://schemas.microsoft.com/office/powerpoint/2013/main/command">
+  <pc:docChgLst>
+    <pc:chgData name="Yujan Basnet" userId="495fd8277ebfbaef" providerId="LiveId" clId="{90797F49-C69F-4594-80A7-2FA1FC770DBD}"/>
+    <pc:docChg chg="modSld">
+      <pc:chgData name="Yujan Basnet" userId="495fd8277ebfbaef" providerId="LiveId" clId="{90797F49-C69F-4594-80A7-2FA1FC770DBD}" dt="2025-06-28T06:04:37.487" v="3" actId="207"/>
+      <pc:docMkLst>
+        <pc:docMk/>
+      </pc:docMkLst>
+      <pc:sldChg chg="modSp mod">
+        <pc:chgData name="Yujan Basnet" userId="495fd8277ebfbaef" providerId="LiveId" clId="{90797F49-C69F-4594-80A7-2FA1FC770DBD}" dt="2025-06-28T06:01:18.736" v="1" actId="207"/>
+        <pc:sldMkLst>
+          <pc:docMk/>
+          <pc:sldMk cId="1795160745" sldId="300"/>
+        </pc:sldMkLst>
+        <pc:spChg chg="mod">
+          <ac:chgData name="Yujan Basnet" userId="495fd8277ebfbaef" providerId="LiveId" clId="{90797F49-C69F-4594-80A7-2FA1FC770DBD}" dt="2025-06-28T06:01:18.736" v="1" actId="207"/>
+          <ac:spMkLst>
+            <pc:docMk/>
+            <pc:sldMk cId="1795160745" sldId="300"/>
+            <ac:spMk id="5" creationId="{00000000-0000-0000-0000-000000000000}"/>
+          </ac:spMkLst>
+        </pc:spChg>
+      </pc:sldChg>
+      <pc:sldChg chg="modSp mod">
+        <pc:chgData name="Yujan Basnet" userId="495fd8277ebfbaef" providerId="LiveId" clId="{90797F49-C69F-4594-80A7-2FA1FC770DBD}" dt="2025-06-28T06:04:37.487" v="3" actId="207"/>
+        <pc:sldMkLst>
+          <pc:docMk/>
+          <pc:sldMk cId="1795160745" sldId="304"/>
+        </pc:sldMkLst>
+        <pc:spChg chg="mod">
+          <ac:chgData name="Yujan Basnet" userId="495fd8277ebfbaef" providerId="LiveId" clId="{90797F49-C69F-4594-80A7-2FA1FC770DBD}" dt="2025-06-28T06:04:37.487" v="3" actId="207"/>
+          <ac:spMkLst>
+            <pc:docMk/>
+            <pc:sldMk cId="1795160745" sldId="304"/>
+            <ac:spMk id="5" creationId="{00000000-0000-0000-0000-000000000000}"/>
+          </ac:spMkLst>
+        </pc:spChg>
+      </pc:sldChg>
+    </pc:docChg>
+  </pc:docChgLst>
   <pc:docChgLst>
     <pc:chgData name="Yujan Basnet" userId="495fd8277ebfbaef" providerId="LiveId" clId="{DC376C04-B98A-431D-A8C0-DA07872EBED5}"/>
     <pc:docChg chg="modSld">
@@ -540,7 +579,7 @@
             <a:fld id="{226EBE57-06B5-493A-882E-E27946C0749C}" type="datetimeFigureOut">
               <a:rPr lang="en-US" smtClean="0"/>
               <a:pPr/>
-              <a:t>6/4/2025</a:t>
+              <a:t>6/28/2025</a:t>
             </a:fld>
             <a:endParaRPr lang="en-US"/>
           </a:p>
@@ -2009,7 +2048,7 @@
           <a:p>
             <a:fld id="{F3A06C3F-8374-4AD9-BDFA-4EB1BCE4F387}" type="datetime1">
               <a:rPr lang="en-US" smtClean="0"/>
-              <a:t>6/4/2025</a:t>
+              <a:t>6/28/2025</a:t>
             </a:fld>
             <a:endParaRPr lang="en-US"/>
           </a:p>
@@ -2177,7 +2216,7 @@
           <a:p>
             <a:fld id="{AEB41C8C-A620-40AB-9572-F7897B7E4057}" type="datetime1">
               <a:rPr lang="en-US" smtClean="0"/>
-              <a:t>6/4/2025</a:t>
+              <a:t>6/28/2025</a:t>
             </a:fld>
             <a:endParaRPr lang="en-US"/>
           </a:p>
@@ -2355,7 +2394,7 @@
           <a:p>
             <a:fld id="{55E084A3-B7E1-43D5-B382-48BBD15E9712}" type="datetime1">
               <a:rPr lang="en-US" smtClean="0"/>
-              <a:t>6/4/2025</a:t>
+              <a:t>6/28/2025</a:t>
             </a:fld>
             <a:endParaRPr lang="en-US"/>
           </a:p>
@@ -2523,7 +2562,7 @@
           <a:p>
             <a:fld id="{50321AC8-3E98-479A-9A83-952E89099D6A}" type="datetime1">
               <a:rPr lang="en-US" smtClean="0"/>
-              <a:t>6/4/2025</a:t>
+              <a:t>6/28/2025</a:t>
             </a:fld>
             <a:endParaRPr lang="en-US"/>
           </a:p>
@@ -2768,7 +2807,7 @@
           <a:p>
             <a:fld id="{C36886AA-679C-40D5-B89F-B0E9CF73B68A}" type="datetime1">
               <a:rPr lang="en-US" smtClean="0"/>
-              <a:t>6/4/2025</a:t>
+              <a:t>6/28/2025</a:t>
             </a:fld>
             <a:endParaRPr lang="en-US"/>
           </a:p>
@@ -3053,7 +3092,7 @@
           <a:p>
             <a:fld id="{D7186D9E-D434-4E85-AFFF-95C20F9173D1}" type="datetime1">
               <a:rPr lang="en-US" smtClean="0"/>
-              <a:t>6/4/2025</a:t>
+              <a:t>6/28/2025</a:t>
             </a:fld>
             <a:endParaRPr lang="en-US"/>
           </a:p>
@@ -3472,7 +3511,7 @@
           <a:p>
             <a:fld id="{E5CBA485-1D81-4549-BC80-E3B492E70F08}" type="datetime1">
               <a:rPr lang="en-US" smtClean="0"/>
-              <a:t>6/4/2025</a:t>
+              <a:t>6/28/2025</a:t>
             </a:fld>
             <a:endParaRPr lang="en-US"/>
           </a:p>
@@ -3589,7 +3628,7 @@
           <a:p>
             <a:fld id="{E6A65823-4BFE-41B2-91F8-0E8F3F580F42}" type="datetime1">
               <a:rPr lang="en-US" smtClean="0"/>
-              <a:t>6/4/2025</a:t>
+              <a:t>6/28/2025</a:t>
             </a:fld>
             <a:endParaRPr lang="en-US"/>
           </a:p>
@@ -3684,7 +3723,7 @@
           <a:p>
             <a:fld id="{58955426-DDB1-4683-AB98-7716C10FBAD4}" type="datetime1">
               <a:rPr lang="en-US" smtClean="0"/>
-              <a:t>6/4/2025</a:t>
+              <a:t>6/28/2025</a:t>
             </a:fld>
             <a:endParaRPr lang="en-US"/>
           </a:p>
@@ -3959,7 +3998,7 @@
           <a:p>
             <a:fld id="{6B36B745-B4CB-485D-8CA2-C1D09880A633}" type="datetime1">
               <a:rPr lang="en-US" smtClean="0"/>
-              <a:t>6/4/2025</a:t>
+              <a:t>6/28/2025</a:t>
             </a:fld>
             <a:endParaRPr lang="en-US"/>
           </a:p>
@@ -4211,7 +4250,7 @@
           <a:p>
             <a:fld id="{DC7CFF9B-2FFA-48B3-8BF2-E22031B15811}" type="datetime1">
               <a:rPr lang="en-US" smtClean="0"/>
-              <a:t>6/4/2025</a:t>
+              <a:t>6/28/2025</a:t>
             </a:fld>
             <a:endParaRPr lang="en-US"/>
           </a:p>
@@ -4422,7 +4461,7 @@
           <a:p>
             <a:fld id="{6210C107-DB33-45FD-B216-45FE50589245}" type="datetime1">
               <a:rPr lang="en-US" smtClean="0"/>
-              <a:t>6/4/2025</a:t>
+              <a:t>6/28/2025</a:t>
             </a:fld>
             <a:endParaRPr lang="en-US"/>
           </a:p>
@@ -16580,7 +16619,22 @@
               <a:rPr lang="en-US" sz="2600" dirty="0">
                 <a:latin typeface="Book Antiqua" pitchFamily="18" charset="0"/>
               </a:rPr>
-              <a:t>The architecture of the Learning Vector Quantization with the m number of classes in an input data and n number of input features for any sample is given below:</a:t>
+              <a:t>The architecture of the Learning Vector Quantization with the </a:t>
+            </a:r>
+            <a:r>
+              <a:rPr lang="en-US" sz="2600" dirty="0">
+                <a:solidFill>
+                  <a:srgbClr val="7030A0"/>
+                </a:solidFill>
+                <a:latin typeface="Book Antiqua" pitchFamily="18" charset="0"/>
+              </a:rPr>
+              <a:t>m number of classes in an input data and n number of input features for any sample </a:t>
+            </a:r>
+            <a:r>
+              <a:rPr lang="en-US" sz="2600" dirty="0">
+                <a:latin typeface="Book Antiqua" pitchFamily="18" charset="0"/>
+              </a:rPr>
+              <a:t>is given below:</a:t>
             </a:r>
           </a:p>
         </p:txBody>
@@ -17342,7 +17396,37 @@
               <a:rPr lang="en-US" sz="2600" dirty="0">
                 <a:latin typeface="Book Antiqua" pitchFamily="18" charset="0"/>
               </a:rPr>
-              <a:t>Construct an LVQ net with five vectors assigned to two classes. Given vectors along with classes is shown below.</a:t>
+              <a:t>Construct an LVQ net with </a:t>
+            </a:r>
+            <a:r>
+              <a:rPr lang="en-US" sz="2600" dirty="0">
+                <a:solidFill>
+                  <a:srgbClr val="00B050"/>
+                </a:solidFill>
+                <a:latin typeface="Book Antiqua" pitchFamily="18" charset="0"/>
+              </a:rPr>
+              <a:t>five vectors </a:t>
+            </a:r>
+            <a:r>
+              <a:rPr lang="en-US" sz="2600" dirty="0">
+                <a:latin typeface="Book Antiqua" pitchFamily="18" charset="0"/>
+              </a:rPr>
+              <a:t>assigned to </a:t>
+            </a:r>
+            <a:r>
+              <a:rPr lang="en-US" sz="2600" dirty="0">
+                <a:solidFill>
+                  <a:srgbClr val="00B050"/>
+                </a:solidFill>
+                <a:latin typeface="Book Antiqua" pitchFamily="18" charset="0"/>
+              </a:rPr>
+              <a:t>two classes</a:t>
+            </a:r>
+            <a:r>
+              <a:rPr lang="en-US" sz="2600" dirty="0">
+                <a:latin typeface="Book Antiqua" pitchFamily="18" charset="0"/>
+              </a:rPr>
+              <a:t>. Given vectors along with classes is shown below.</a:t>
             </a:r>
           </a:p>
           <a:p>
